--- a/multiobject_examples_book/MO_selection/EI_HV/PI.pptx
+++ b/multiobject_examples_book/MO_selection/EI_HV/PI.pptx
@@ -6,6 +6,7 @@
   </p:sldMasterIdLst>
   <p:sldIdLst>
     <p:sldId id="256" r:id="rId2"/>
+    <p:sldId id="257" r:id="rId3"/>
   </p:sldIdLst>
   <p:sldSz cx="16200438" cy="10799763"/>
   <p:notesSz cx="6858000" cy="9144000"/>
@@ -243,7 +244,7 @@
           <a:p>
             <a:fld id="{CB043C71-DADB-4A33-AEC5-05BB719E0DA8}" type="datetimeFigureOut">
               <a:rPr lang="zh-CN" altLang="en-US" smtClean="0"/>
-              <a:t>2024/12/16</a:t>
+              <a:t>2024/12/22</a:t>
             </a:fld>
             <a:endParaRPr lang="zh-CN" altLang="en-US"/>
           </a:p>
@@ -413,7 +414,7 @@
           <a:p>
             <a:fld id="{CB043C71-DADB-4A33-AEC5-05BB719E0DA8}" type="datetimeFigureOut">
               <a:rPr lang="zh-CN" altLang="en-US" smtClean="0"/>
-              <a:t>2024/12/16</a:t>
+              <a:t>2024/12/22</a:t>
             </a:fld>
             <a:endParaRPr lang="zh-CN" altLang="en-US"/>
           </a:p>
@@ -593,7 +594,7 @@
           <a:p>
             <a:fld id="{CB043C71-DADB-4A33-AEC5-05BB719E0DA8}" type="datetimeFigureOut">
               <a:rPr lang="zh-CN" altLang="en-US" smtClean="0"/>
-              <a:t>2024/12/16</a:t>
+              <a:t>2024/12/22</a:t>
             </a:fld>
             <a:endParaRPr lang="zh-CN" altLang="en-US"/>
           </a:p>
@@ -763,7 +764,7 @@
           <a:p>
             <a:fld id="{CB043C71-DADB-4A33-AEC5-05BB719E0DA8}" type="datetimeFigureOut">
               <a:rPr lang="zh-CN" altLang="en-US" smtClean="0"/>
-              <a:t>2024/12/16</a:t>
+              <a:t>2024/12/22</a:t>
             </a:fld>
             <a:endParaRPr lang="zh-CN" altLang="en-US"/>
           </a:p>
@@ -1007,7 +1008,7 @@
           <a:p>
             <a:fld id="{CB043C71-DADB-4A33-AEC5-05BB719E0DA8}" type="datetimeFigureOut">
               <a:rPr lang="zh-CN" altLang="en-US" smtClean="0"/>
-              <a:t>2024/12/16</a:t>
+              <a:t>2024/12/22</a:t>
             </a:fld>
             <a:endParaRPr lang="zh-CN" altLang="en-US"/>
           </a:p>
@@ -1239,7 +1240,7 @@
           <a:p>
             <a:fld id="{CB043C71-DADB-4A33-AEC5-05BB719E0DA8}" type="datetimeFigureOut">
               <a:rPr lang="zh-CN" altLang="en-US" smtClean="0"/>
-              <a:t>2024/12/16</a:t>
+              <a:t>2024/12/22</a:t>
             </a:fld>
             <a:endParaRPr lang="zh-CN" altLang="en-US"/>
           </a:p>
@@ -1606,7 +1607,7 @@
           <a:p>
             <a:fld id="{CB043C71-DADB-4A33-AEC5-05BB719E0DA8}" type="datetimeFigureOut">
               <a:rPr lang="zh-CN" altLang="en-US" smtClean="0"/>
-              <a:t>2024/12/16</a:t>
+              <a:t>2024/12/22</a:t>
             </a:fld>
             <a:endParaRPr lang="zh-CN" altLang="en-US"/>
           </a:p>
@@ -1724,7 +1725,7 @@
           <a:p>
             <a:fld id="{CB043C71-DADB-4A33-AEC5-05BB719E0DA8}" type="datetimeFigureOut">
               <a:rPr lang="zh-CN" altLang="en-US" smtClean="0"/>
-              <a:t>2024/12/16</a:t>
+              <a:t>2024/12/22</a:t>
             </a:fld>
             <a:endParaRPr lang="zh-CN" altLang="en-US"/>
           </a:p>
@@ -1819,7 +1820,7 @@
           <a:p>
             <a:fld id="{CB043C71-DADB-4A33-AEC5-05BB719E0DA8}" type="datetimeFigureOut">
               <a:rPr lang="zh-CN" altLang="en-US" smtClean="0"/>
-              <a:t>2024/12/16</a:t>
+              <a:t>2024/12/22</a:t>
             </a:fld>
             <a:endParaRPr lang="zh-CN" altLang="en-US"/>
           </a:p>
@@ -2096,7 +2097,7 @@
           <a:p>
             <a:fld id="{CB043C71-DADB-4A33-AEC5-05BB719E0DA8}" type="datetimeFigureOut">
               <a:rPr lang="zh-CN" altLang="en-US" smtClean="0"/>
-              <a:t>2024/12/16</a:t>
+              <a:t>2024/12/22</a:t>
             </a:fld>
             <a:endParaRPr lang="zh-CN" altLang="en-US"/>
           </a:p>
@@ -2353,7 +2354,7 @@
           <a:p>
             <a:fld id="{CB043C71-DADB-4A33-AEC5-05BB719E0DA8}" type="datetimeFigureOut">
               <a:rPr lang="zh-CN" altLang="en-US" smtClean="0"/>
-              <a:t>2024/12/16</a:t>
+              <a:t>2024/12/22</a:t>
             </a:fld>
             <a:endParaRPr lang="zh-CN" altLang="en-US"/>
           </a:p>
@@ -2566,7 +2567,7 @@
           <a:p>
             <a:fld id="{CB043C71-DADB-4A33-AEC5-05BB719E0DA8}" type="datetimeFigureOut">
               <a:rPr lang="zh-CN" altLang="en-US" smtClean="0"/>
-              <a:t>2024/12/16</a:t>
+              <a:t>2024/12/22</a:t>
             </a:fld>
             <a:endParaRPr lang="zh-CN" altLang="en-US"/>
           </a:p>
@@ -3202,10 +3203,383 @@
           </a:p>
         </p:txBody>
       </p:sp>
+      <p:pic>
+        <p:nvPicPr>
+          <p:cNvPr id="2" name="图片 1">
+            <a:extLst>
+              <a:ext uri="{FF2B5EF4-FFF2-40B4-BE49-F238E27FC236}">
+                <a16:creationId xmlns:a16="http://schemas.microsoft.com/office/drawing/2014/main" id="{54B8A27D-7BE0-A0C8-F34B-B00D971C0EE2}"/>
+              </a:ext>
+            </a:extLst>
+          </p:cNvPr>
+          <p:cNvPicPr>
+            <a:picLocks noChangeAspect="1"/>
+          </p:cNvPicPr>
+          <p:nvPr/>
+        </p:nvPicPr>
+        <p:blipFill>
+          <a:blip r:embed="rId5"/>
+          <a:stretch>
+            <a:fillRect/>
+          </a:stretch>
+        </p:blipFill>
+        <p:spPr>
+          <a:xfrm>
+            <a:off x="3731350" y="2141665"/>
+            <a:ext cx="1274325" cy="453092"/>
+          </a:xfrm>
+          <a:prstGeom prst="rect">
+            <a:avLst/>
+          </a:prstGeom>
+        </p:spPr>
+      </p:pic>
+      <p:sp>
+        <p:nvSpPr>
+          <p:cNvPr id="4" name="文本框 3">
+            <a:extLst>
+              <a:ext uri="{FF2B5EF4-FFF2-40B4-BE49-F238E27FC236}">
+                <a16:creationId xmlns:a16="http://schemas.microsoft.com/office/drawing/2014/main" id="{60E09F74-F010-C246-8E81-6E6FCE7A5C72}"/>
+              </a:ext>
+            </a:extLst>
+          </p:cNvPr>
+          <p:cNvSpPr txBox="1"/>
+          <p:nvPr/>
+        </p:nvSpPr>
+        <p:spPr>
+          <a:xfrm>
+            <a:off x="3707195" y="2156803"/>
+            <a:ext cx="1141659" cy="307777"/>
+          </a:xfrm>
+          <a:prstGeom prst="rect">
+            <a:avLst/>
+          </a:prstGeom>
+          <a:noFill/>
+        </p:spPr>
+        <p:txBody>
+          <a:bodyPr wrap="none" rtlCol="0">
+            <a:spAutoFit/>
+          </a:bodyPr>
+          <a:lstStyle/>
+          <a:p>
+            <a:r>
+              <a:rPr lang="en-US" altLang="zh-CN" sz="1400" dirty="0">
+                <a:latin typeface="Arial" panose="020B0604020202020204" pitchFamily="34" charset="0"/>
+                <a:cs typeface="Arial" panose="020B0604020202020204" pitchFamily="34" charset="0"/>
+              </a:rPr>
+              <a:t>SVM values</a:t>
+            </a:r>
+            <a:endParaRPr lang="zh-CN" altLang="en-US" sz="1400" dirty="0">
+              <a:latin typeface="Arial" panose="020B0604020202020204" pitchFamily="34" charset="0"/>
+              <a:cs typeface="Arial" panose="020B0604020202020204" pitchFamily="34" charset="0"/>
+            </a:endParaRPr>
+          </a:p>
+        </p:txBody>
+      </p:sp>
+      <p:pic>
+        <p:nvPicPr>
+          <p:cNvPr id="6" name="图片 5">
+            <a:extLst>
+              <a:ext uri="{FF2B5EF4-FFF2-40B4-BE49-F238E27FC236}">
+                <a16:creationId xmlns:a16="http://schemas.microsoft.com/office/drawing/2014/main" id="{EC89056C-3AAE-096A-2B91-BF9769AACA5C}"/>
+              </a:ext>
+            </a:extLst>
+          </p:cNvPr>
+          <p:cNvPicPr>
+            <a:picLocks noChangeAspect="1"/>
+          </p:cNvPicPr>
+          <p:nvPr/>
+        </p:nvPicPr>
+        <p:blipFill>
+          <a:blip r:embed="rId5"/>
+          <a:stretch>
+            <a:fillRect/>
+          </a:stretch>
+        </p:blipFill>
+        <p:spPr>
+          <a:xfrm>
+            <a:off x="8774648" y="2141665"/>
+            <a:ext cx="1274325" cy="453092"/>
+          </a:xfrm>
+          <a:prstGeom prst="rect">
+            <a:avLst/>
+          </a:prstGeom>
+        </p:spPr>
+      </p:pic>
+      <p:sp>
+        <p:nvSpPr>
+          <p:cNvPr id="7" name="文本框 6">
+            <a:extLst>
+              <a:ext uri="{FF2B5EF4-FFF2-40B4-BE49-F238E27FC236}">
+                <a16:creationId xmlns:a16="http://schemas.microsoft.com/office/drawing/2014/main" id="{BA717887-7020-4350-45CC-9654F88D4316}"/>
+              </a:ext>
+            </a:extLst>
+          </p:cNvPr>
+          <p:cNvSpPr txBox="1"/>
+          <p:nvPr/>
+        </p:nvSpPr>
+        <p:spPr>
+          <a:xfrm>
+            <a:off x="8750493" y="2156803"/>
+            <a:ext cx="1141659" cy="307777"/>
+          </a:xfrm>
+          <a:prstGeom prst="rect">
+            <a:avLst/>
+          </a:prstGeom>
+          <a:noFill/>
+        </p:spPr>
+        <p:txBody>
+          <a:bodyPr wrap="none" rtlCol="0">
+            <a:spAutoFit/>
+          </a:bodyPr>
+          <a:lstStyle/>
+          <a:p>
+            <a:r>
+              <a:rPr lang="en-US" altLang="zh-CN" sz="1400" dirty="0">
+                <a:latin typeface="Arial" panose="020B0604020202020204" pitchFamily="34" charset="0"/>
+                <a:cs typeface="Arial" panose="020B0604020202020204" pitchFamily="34" charset="0"/>
+              </a:rPr>
+              <a:t>SVM values</a:t>
+            </a:r>
+            <a:endParaRPr lang="zh-CN" altLang="en-US" sz="1400" dirty="0">
+              <a:latin typeface="Arial" panose="020B0604020202020204" pitchFamily="34" charset="0"/>
+              <a:cs typeface="Arial" panose="020B0604020202020204" pitchFamily="34" charset="0"/>
+            </a:endParaRPr>
+          </a:p>
+        </p:txBody>
+      </p:sp>
+      <p:pic>
+        <p:nvPicPr>
+          <p:cNvPr id="9" name="图片 8">
+            <a:extLst>
+              <a:ext uri="{FF2B5EF4-FFF2-40B4-BE49-F238E27FC236}">
+                <a16:creationId xmlns:a16="http://schemas.microsoft.com/office/drawing/2014/main" id="{971F76E4-111E-5D41-DE9D-214218B3C9D5}"/>
+              </a:ext>
+            </a:extLst>
+          </p:cNvPr>
+          <p:cNvPicPr>
+            <a:picLocks noChangeAspect="1"/>
+          </p:cNvPicPr>
+          <p:nvPr/>
+        </p:nvPicPr>
+        <p:blipFill>
+          <a:blip r:embed="rId5"/>
+          <a:stretch>
+            <a:fillRect/>
+          </a:stretch>
+        </p:blipFill>
+        <p:spPr>
+          <a:xfrm>
+            <a:off x="13842101" y="2141665"/>
+            <a:ext cx="1274325" cy="453092"/>
+          </a:xfrm>
+          <a:prstGeom prst="rect">
+            <a:avLst/>
+          </a:prstGeom>
+        </p:spPr>
+      </p:pic>
+      <p:sp>
+        <p:nvSpPr>
+          <p:cNvPr id="11" name="文本框 10">
+            <a:extLst>
+              <a:ext uri="{FF2B5EF4-FFF2-40B4-BE49-F238E27FC236}">
+                <a16:creationId xmlns:a16="http://schemas.microsoft.com/office/drawing/2014/main" id="{988FF4BA-A51D-1F58-135B-971053267284}"/>
+              </a:ext>
+            </a:extLst>
+          </p:cNvPr>
+          <p:cNvSpPr txBox="1"/>
+          <p:nvPr/>
+        </p:nvSpPr>
+        <p:spPr>
+          <a:xfrm>
+            <a:off x="13817946" y="2156803"/>
+            <a:ext cx="1141659" cy="307777"/>
+          </a:xfrm>
+          <a:prstGeom prst="rect">
+            <a:avLst/>
+          </a:prstGeom>
+          <a:noFill/>
+        </p:spPr>
+        <p:txBody>
+          <a:bodyPr wrap="none" rtlCol="0">
+            <a:spAutoFit/>
+          </a:bodyPr>
+          <a:lstStyle/>
+          <a:p>
+            <a:r>
+              <a:rPr lang="en-US" altLang="zh-CN" sz="1400" dirty="0">
+                <a:latin typeface="Arial" panose="020B0604020202020204" pitchFamily="34" charset="0"/>
+                <a:cs typeface="Arial" panose="020B0604020202020204" pitchFamily="34" charset="0"/>
+              </a:rPr>
+              <a:t>SVM values</a:t>
+            </a:r>
+            <a:endParaRPr lang="zh-CN" altLang="en-US" sz="1400" dirty="0">
+              <a:latin typeface="Arial" panose="020B0604020202020204" pitchFamily="34" charset="0"/>
+              <a:cs typeface="Arial" panose="020B0604020202020204" pitchFamily="34" charset="0"/>
+            </a:endParaRPr>
+          </a:p>
+        </p:txBody>
+      </p:sp>
     </p:spTree>
     <p:extLst>
       <p:ext uri="{BB962C8B-B14F-4D97-AF65-F5344CB8AC3E}">
         <p14:creationId xmlns:p14="http://schemas.microsoft.com/office/powerpoint/2010/main" val="1444005626"/>
+      </p:ext>
+    </p:extLst>
+  </p:cSld>
+  <p:clrMapOvr>
+    <a:masterClrMapping/>
+  </p:clrMapOvr>
+</p:sld>
+</file>
+
+<file path=ppt/slides/slide2.xml><?xml version="1.0" encoding="utf-8"?>
+<p:sld xmlns:a="http://schemas.openxmlformats.org/drawingml/2006/main" xmlns:r="http://schemas.openxmlformats.org/officeDocument/2006/relationships" xmlns:p="http://schemas.openxmlformats.org/presentationml/2006/main">
+  <p:cSld>
+    <p:spTree>
+      <p:nvGrpSpPr>
+        <p:cNvPr id="1" name="">
+          <a:extLst>
+            <a:ext uri="{FF2B5EF4-FFF2-40B4-BE49-F238E27FC236}">
+              <a16:creationId xmlns:a16="http://schemas.microsoft.com/office/drawing/2014/main" id="{8924DF28-1F3F-96DB-AE38-4741598644F7}"/>
+            </a:ext>
+          </a:extLst>
+        </p:cNvPr>
+        <p:cNvGrpSpPr/>
+        <p:nvPr/>
+      </p:nvGrpSpPr>
+      <p:grpSpPr>
+        <a:xfrm>
+          <a:off x="0" y="0"/>
+          <a:ext cx="0" cy="0"/>
+          <a:chOff x="0" y="0"/>
+          <a:chExt cx="0" cy="0"/>
+        </a:xfrm>
+      </p:grpSpPr>
+      <p:pic>
+        <p:nvPicPr>
+          <p:cNvPr id="14" name="图片 13">
+            <a:extLst>
+              <a:ext uri="{FF2B5EF4-FFF2-40B4-BE49-F238E27FC236}">
+                <a16:creationId xmlns:a16="http://schemas.microsoft.com/office/drawing/2014/main" id="{09677BE2-00F1-C58B-9E29-900365BFA096}"/>
+              </a:ext>
+            </a:extLst>
+          </p:cNvPr>
+          <p:cNvPicPr>
+            <a:picLocks noChangeAspect="1"/>
+          </p:cNvPicPr>
+          <p:nvPr/>
+        </p:nvPicPr>
+        <p:blipFill>
+          <a:blip r:embed="rId2" cstate="print">
+            <a:extLst>
+              <a:ext uri="{28A0092B-C50C-407E-A947-70E740481C1C}">
+                <a14:useLocalDpi xmlns:a14="http://schemas.microsoft.com/office/drawing/2010/main" val="0"/>
+              </a:ext>
+            </a:extLst>
+          </a:blip>
+          <a:srcRect/>
+          <a:stretch>
+            <a:fillRect/>
+          </a:stretch>
+        </p:blipFill>
+        <p:spPr bwMode="auto">
+          <a:xfrm>
+            <a:off x="3442411" y="656747"/>
+            <a:ext cx="8656218" cy="8656218"/>
+          </a:xfrm>
+          <a:prstGeom prst="rect">
+            <a:avLst/>
+          </a:prstGeom>
+          <a:noFill/>
+          <a:ln>
+            <a:noFill/>
+          </a:ln>
+        </p:spPr>
+      </p:pic>
+      <p:cxnSp>
+        <p:nvCxnSpPr>
+          <p:cNvPr id="15" name="直接连接符 14">
+            <a:extLst>
+              <a:ext uri="{FF2B5EF4-FFF2-40B4-BE49-F238E27FC236}">
+                <a16:creationId xmlns:a16="http://schemas.microsoft.com/office/drawing/2014/main" id="{402CAFC0-0056-DE86-7B3F-E149657A08BA}"/>
+              </a:ext>
+            </a:extLst>
+          </p:cNvPr>
+          <p:cNvCxnSpPr>
+            <a:cxnSpLocks/>
+          </p:cNvCxnSpPr>
+          <p:nvPr/>
+        </p:nvCxnSpPr>
+        <p:spPr>
+          <a:xfrm flipH="1">
+            <a:off x="4555434" y="8063947"/>
+            <a:ext cx="6619461" cy="0"/>
+          </a:xfrm>
+          <a:prstGeom prst="line">
+            <a:avLst/>
+          </a:prstGeom>
+          <a:ln>
+            <a:prstDash val="dash"/>
+          </a:ln>
+        </p:spPr>
+        <p:style>
+          <a:lnRef idx="1">
+            <a:schemeClr val="dk1"/>
+          </a:lnRef>
+          <a:fillRef idx="0">
+            <a:schemeClr val="dk1"/>
+          </a:fillRef>
+          <a:effectRef idx="0">
+            <a:schemeClr val="dk1"/>
+          </a:effectRef>
+          <a:fontRef idx="minor">
+            <a:schemeClr val="tx1"/>
+          </a:fontRef>
+        </p:style>
+      </p:cxnSp>
+      <p:cxnSp>
+        <p:nvCxnSpPr>
+          <p:cNvPr id="17" name="直接连接符 16">
+            <a:extLst>
+              <a:ext uri="{FF2B5EF4-FFF2-40B4-BE49-F238E27FC236}">
+                <a16:creationId xmlns:a16="http://schemas.microsoft.com/office/drawing/2014/main" id="{FD68020B-63F4-CA01-1863-7E023D5FD9D2}"/>
+              </a:ext>
+            </a:extLst>
+          </p:cNvPr>
+          <p:cNvCxnSpPr/>
+          <p:nvPr/>
+        </p:nvCxnSpPr>
+        <p:spPr>
+          <a:xfrm>
+            <a:off x="4992757" y="1782037"/>
+            <a:ext cx="0" cy="6539948"/>
+          </a:xfrm>
+          <a:prstGeom prst="line">
+            <a:avLst/>
+          </a:prstGeom>
+          <a:ln>
+            <a:prstDash val="dash"/>
+          </a:ln>
+        </p:spPr>
+        <p:style>
+          <a:lnRef idx="1">
+            <a:schemeClr val="dk1"/>
+          </a:lnRef>
+          <a:fillRef idx="0">
+            <a:schemeClr val="dk1"/>
+          </a:fillRef>
+          <a:effectRef idx="0">
+            <a:schemeClr val="dk1"/>
+          </a:effectRef>
+          <a:fontRef idx="minor">
+            <a:schemeClr val="tx1"/>
+          </a:fontRef>
+        </p:style>
+      </p:cxnSp>
+    </p:spTree>
+    <p:extLst>
+      <p:ext uri="{BB962C8B-B14F-4D97-AF65-F5344CB8AC3E}">
+        <p14:creationId xmlns:p14="http://schemas.microsoft.com/office/powerpoint/2010/main" val="2431670188"/>
       </p:ext>
     </p:extLst>
   </p:cSld>

--- a/multiobject_examples_book/MO_selection/EI_HV/PI.pptx
+++ b/multiobject_examples_book/MO_selection/EI_HV/PI.pptx
@@ -244,7 +244,7 @@
           <a:p>
             <a:fld id="{CB043C71-DADB-4A33-AEC5-05BB719E0DA8}" type="datetimeFigureOut">
               <a:rPr lang="zh-CN" altLang="en-US" smtClean="0"/>
-              <a:t>2024/12/22</a:t>
+              <a:t>2024/12/31</a:t>
             </a:fld>
             <a:endParaRPr lang="zh-CN" altLang="en-US"/>
           </a:p>
@@ -414,7 +414,7 @@
           <a:p>
             <a:fld id="{CB043C71-DADB-4A33-AEC5-05BB719E0DA8}" type="datetimeFigureOut">
               <a:rPr lang="zh-CN" altLang="en-US" smtClean="0"/>
-              <a:t>2024/12/22</a:t>
+              <a:t>2024/12/31</a:t>
             </a:fld>
             <a:endParaRPr lang="zh-CN" altLang="en-US"/>
           </a:p>
@@ -594,7 +594,7 @@
           <a:p>
             <a:fld id="{CB043C71-DADB-4A33-AEC5-05BB719E0DA8}" type="datetimeFigureOut">
               <a:rPr lang="zh-CN" altLang="en-US" smtClean="0"/>
-              <a:t>2024/12/22</a:t>
+              <a:t>2024/12/31</a:t>
             </a:fld>
             <a:endParaRPr lang="zh-CN" altLang="en-US"/>
           </a:p>
@@ -764,7 +764,7 @@
           <a:p>
             <a:fld id="{CB043C71-DADB-4A33-AEC5-05BB719E0DA8}" type="datetimeFigureOut">
               <a:rPr lang="zh-CN" altLang="en-US" smtClean="0"/>
-              <a:t>2024/12/22</a:t>
+              <a:t>2024/12/31</a:t>
             </a:fld>
             <a:endParaRPr lang="zh-CN" altLang="en-US"/>
           </a:p>
@@ -1008,7 +1008,7 @@
           <a:p>
             <a:fld id="{CB043C71-DADB-4A33-AEC5-05BB719E0DA8}" type="datetimeFigureOut">
               <a:rPr lang="zh-CN" altLang="en-US" smtClean="0"/>
-              <a:t>2024/12/22</a:t>
+              <a:t>2024/12/31</a:t>
             </a:fld>
             <a:endParaRPr lang="zh-CN" altLang="en-US"/>
           </a:p>
@@ -1240,7 +1240,7 @@
           <a:p>
             <a:fld id="{CB043C71-DADB-4A33-AEC5-05BB719E0DA8}" type="datetimeFigureOut">
               <a:rPr lang="zh-CN" altLang="en-US" smtClean="0"/>
-              <a:t>2024/12/22</a:t>
+              <a:t>2024/12/31</a:t>
             </a:fld>
             <a:endParaRPr lang="zh-CN" altLang="en-US"/>
           </a:p>
@@ -1607,7 +1607,7 @@
           <a:p>
             <a:fld id="{CB043C71-DADB-4A33-AEC5-05BB719E0DA8}" type="datetimeFigureOut">
               <a:rPr lang="zh-CN" altLang="en-US" smtClean="0"/>
-              <a:t>2024/12/22</a:t>
+              <a:t>2024/12/31</a:t>
             </a:fld>
             <a:endParaRPr lang="zh-CN" altLang="en-US"/>
           </a:p>
@@ -1725,7 +1725,7 @@
           <a:p>
             <a:fld id="{CB043C71-DADB-4A33-AEC5-05BB719E0DA8}" type="datetimeFigureOut">
               <a:rPr lang="zh-CN" altLang="en-US" smtClean="0"/>
-              <a:t>2024/12/22</a:t>
+              <a:t>2024/12/31</a:t>
             </a:fld>
             <a:endParaRPr lang="zh-CN" altLang="en-US"/>
           </a:p>
@@ -1820,7 +1820,7 @@
           <a:p>
             <a:fld id="{CB043C71-DADB-4A33-AEC5-05BB719E0DA8}" type="datetimeFigureOut">
               <a:rPr lang="zh-CN" altLang="en-US" smtClean="0"/>
-              <a:t>2024/12/22</a:t>
+              <a:t>2024/12/31</a:t>
             </a:fld>
             <a:endParaRPr lang="zh-CN" altLang="en-US"/>
           </a:p>
@@ -2097,7 +2097,7 @@
           <a:p>
             <a:fld id="{CB043C71-DADB-4A33-AEC5-05BB719E0DA8}" type="datetimeFigureOut">
               <a:rPr lang="zh-CN" altLang="en-US" smtClean="0"/>
-              <a:t>2024/12/22</a:t>
+              <a:t>2024/12/31</a:t>
             </a:fld>
             <a:endParaRPr lang="zh-CN" altLang="en-US"/>
           </a:p>
@@ -2354,7 +2354,7 @@
           <a:p>
             <a:fld id="{CB043C71-DADB-4A33-AEC5-05BB719E0DA8}" type="datetimeFigureOut">
               <a:rPr lang="zh-CN" altLang="en-US" smtClean="0"/>
-              <a:t>2024/12/22</a:t>
+              <a:t>2024/12/31</a:t>
             </a:fld>
             <a:endParaRPr lang="zh-CN" altLang="en-US"/>
           </a:p>
@@ -2567,7 +2567,7 @@
           <a:p>
             <a:fld id="{CB043C71-DADB-4A33-AEC5-05BB719E0DA8}" type="datetimeFigureOut">
               <a:rPr lang="zh-CN" altLang="en-US" smtClean="0"/>
-              <a:t>2024/12/22</a:t>
+              <a:t>2024/12/31</a:t>
             </a:fld>
             <a:endParaRPr lang="zh-CN" altLang="en-US"/>
           </a:p>
@@ -3576,6 +3576,88 @@
           </a:fontRef>
         </p:style>
       </p:cxnSp>
+      <p:cxnSp>
+        <p:nvCxnSpPr>
+          <p:cNvPr id="2" name="直接连接符 1">
+            <a:extLst>
+              <a:ext uri="{FF2B5EF4-FFF2-40B4-BE49-F238E27FC236}">
+                <a16:creationId xmlns:a16="http://schemas.microsoft.com/office/drawing/2014/main" id="{ABF664F3-3183-C175-B511-7B44D9BB4B14}"/>
+              </a:ext>
+            </a:extLst>
+          </p:cNvPr>
+          <p:cNvCxnSpPr>
+            <a:cxnSpLocks/>
+          </p:cNvCxnSpPr>
+          <p:nvPr/>
+        </p:nvCxnSpPr>
+        <p:spPr>
+          <a:xfrm flipH="1">
+            <a:off x="8679656" y="4255339"/>
+            <a:ext cx="356394" cy="0"/>
+          </a:xfrm>
+          <a:prstGeom prst="line">
+            <a:avLst/>
+          </a:prstGeom>
+          <a:ln>
+            <a:prstDash val="dash"/>
+          </a:ln>
+        </p:spPr>
+        <p:style>
+          <a:lnRef idx="1">
+            <a:schemeClr val="dk1"/>
+          </a:lnRef>
+          <a:fillRef idx="0">
+            <a:schemeClr val="dk1"/>
+          </a:fillRef>
+          <a:effectRef idx="0">
+            <a:schemeClr val="dk1"/>
+          </a:effectRef>
+          <a:fontRef idx="minor">
+            <a:schemeClr val="tx1"/>
+          </a:fontRef>
+        </p:style>
+      </p:cxnSp>
+      <p:cxnSp>
+        <p:nvCxnSpPr>
+          <p:cNvPr id="5" name="直接连接符 4">
+            <a:extLst>
+              <a:ext uri="{FF2B5EF4-FFF2-40B4-BE49-F238E27FC236}">
+                <a16:creationId xmlns:a16="http://schemas.microsoft.com/office/drawing/2014/main" id="{3ED79419-1B22-E7EB-30BD-0037F04059DF}"/>
+              </a:ext>
+            </a:extLst>
+          </p:cNvPr>
+          <p:cNvCxnSpPr>
+            <a:cxnSpLocks/>
+          </p:cNvCxnSpPr>
+          <p:nvPr/>
+        </p:nvCxnSpPr>
+        <p:spPr>
+          <a:xfrm flipV="1">
+            <a:off x="9036050" y="4255339"/>
+            <a:ext cx="0" cy="835774"/>
+          </a:xfrm>
+          <a:prstGeom prst="line">
+            <a:avLst/>
+          </a:prstGeom>
+          <a:ln>
+            <a:prstDash val="dash"/>
+          </a:ln>
+        </p:spPr>
+        <p:style>
+          <a:lnRef idx="1">
+            <a:schemeClr val="dk1"/>
+          </a:lnRef>
+          <a:fillRef idx="0">
+            <a:schemeClr val="dk1"/>
+          </a:fillRef>
+          <a:effectRef idx="0">
+            <a:schemeClr val="dk1"/>
+          </a:effectRef>
+          <a:fontRef idx="minor">
+            <a:schemeClr val="tx1"/>
+          </a:fontRef>
+        </p:style>
+      </p:cxnSp>
     </p:spTree>
     <p:extLst>
       <p:ext uri="{BB962C8B-B14F-4D97-AF65-F5344CB8AC3E}">
